--- a/decks/weekly-2026-W34_V2_retest.pptx
+++ b/decks/weekly-2026-W34_V2_retest.pptx
@@ -19875,7 +19875,7 @@
                   <a:srgbClr val="1F1F1F"/>
                 </a:solidFill>
               </a:rPr>
-              <a:t>TIM</a:t>
+              <a:t>MLT</a:t>
             </a:r>
           </a:p>
           <a:p>
@@ -19890,7 +19890,7 @@
                   <a:srgbClr val="6B6B6B"/>
                 </a:solidFill>
               </a:rPr>
-              <a:t>first-pass yield 48.4% · 161 units</a:t>
+              <a:t>first-pass yield 71.2% · 350 units</a:t>
             </a:r>
           </a:p>
         </p:txBody>
@@ -19928,7 +19928,7 @@
                   <a:srgbClr val="C0392B"/>
                 </a:solidFill>
               </a:rPr>
-              <a:t>14.6%</a:t>
+              <a:t>10.0%</a:t>
             </a:r>
           </a:p>
           <a:p>
@@ -19943,7 +19943,7 @@
                   <a:srgbClr val="6B6B6B"/>
                 </a:solidFill>
               </a:rPr>
-              <a:t>12 of 82 first-pass failures came back</a:t>
+              <a:t>10 of 100 first-pass failures came back</a:t>
             </a:r>
           </a:p>
         </p:txBody>
@@ -19996,7 +19996,7 @@
                   <a:srgbClr val="1F1F1F"/>
                 </a:solidFill>
               </a:rPr>
-              <a:t>12</a:t>
+              <a:t>7</a:t>
             </a:r>
             <a:r>
               <a:rPr sz="1050" b="0">
@@ -20019,7 +20019,7 @@
                   <a:srgbClr val="1F1F1F"/>
                 </a:solidFill>
               </a:rPr>
-              <a:t>0</a:t>
+              <a:t>3</a:t>
             </a:r>
             <a:r>
               <a:rPr sz="1050" b="0">
@@ -20042,7 +20042,7 @@
                   <a:srgbClr val="C0392B"/>
                 </a:solidFill>
               </a:rPr>
-              <a:t>70 still in the bonepile</a:t>
+              <a:t>90 still in the bonepile</a:t>
             </a:r>
           </a:p>
         </p:txBody>
@@ -20080,7 +20080,7 @@
                   <a:srgbClr val="1F1F1F"/>
                 </a:solidFill>
               </a:rPr>
-              <a:t>MLT</a:t>
+              <a:t>HTT</a:t>
             </a:r>
           </a:p>
           <a:p>
@@ -20095,7 +20095,7 @@
                   <a:srgbClr val="6B6B6B"/>
                 </a:solidFill>
               </a:rPr>
-              <a:t>first-pass yield 71.2% · 350 units</a:t>
+              <a:t>first-pass yield 77.1% · 265 units</a:t>
             </a:r>
           </a:p>
         </p:txBody>
@@ -20133,7 +20133,7 @@
                   <a:srgbClr val="C0392B"/>
                 </a:solidFill>
               </a:rPr>
-              <a:t>10.0%</a:t>
+              <a:t>0.0%</a:t>
             </a:r>
           </a:p>
           <a:p>
@@ -20148,7 +20148,7 @@
                   <a:srgbClr val="6B6B6B"/>
                 </a:solidFill>
               </a:rPr>
-              <a:t>10 of 100 first-pass failures came back</a:t>
+              <a:t>0 of 68 first-pass failures came back</a:t>
             </a:r>
           </a:p>
         </p:txBody>
@@ -20196,211 +20196,6 @@
               </a:spcAft>
             </a:pPr>
             <a:r>
-              <a:rPr sz="1500" b="1">
-                <a:solidFill>
-                  <a:srgbClr val="1F1F1F"/>
-                </a:solidFill>
-              </a:rPr>
-              <a:t>7</a:t>
-            </a:r>
-            <a:r>
-              <a:rPr sz="1050" b="0">
-                <a:solidFill>
-                  <a:srgbClr val="1F1F1F"/>
-                </a:solidFill>
-              </a:rPr>
-              <a:t>  same software release — the first failure did not reproduce</a:t>
-            </a:r>
-          </a:p>
-          <a:p>
-            <a:pPr>
-              <a:spcAft>
-                <a:spcPts val="500"/>
-              </a:spcAft>
-            </a:pPr>
-            <a:r>
-              <a:rPr sz="1500" b="1">
-                <a:solidFill>
-                  <a:srgbClr val="1F1F1F"/>
-                </a:solidFill>
-              </a:rPr>
-              <a:t>3</a:t>
-            </a:r>
-            <a:r>
-              <a:rPr sz="1050" b="0">
-                <a:solidFill>
-                  <a:srgbClr val="1F1F1F"/>
-                </a:solidFill>
-              </a:rPr>
-              <a:t>  a different release — a fix released the unit</a:t>
-            </a:r>
-          </a:p>
-          <a:p>
-            <a:pPr>
-              <a:spcAft>
-                <a:spcPts val="500"/>
-              </a:spcAft>
-            </a:pPr>
-            <a:r>
-              <a:rPr sz="1100" b="1">
-                <a:solidFill>
-                  <a:srgbClr val="C0392B"/>
-                </a:solidFill>
-              </a:rPr>
-              <a:t>90 still in the bonepile</a:t>
-            </a:r>
-          </a:p>
-        </p:txBody>
-      </p:sp>
-      <p:sp>
-        <p:nvSpPr>
-          <p:cNvPr id="11" name="TextBox 10"/>
-          <p:cNvSpPr txBox="1"/>
-          <p:nvPr/>
-        </p:nvSpPr>
-        <p:spPr>
-          <a:xfrm>
-            <a:off x="8275320" y="1938528"/>
-            <a:ext cx="3566160" cy="365760"/>
-          </a:xfrm>
-          <a:prstGeom prst="rect">
-            <a:avLst/>
-          </a:prstGeom>
-          <a:noFill/>
-        </p:spPr>
-        <p:txBody>
-          <a:bodyPr wrap="square">
-            <a:spAutoFit/>
-          </a:bodyPr>
-          <a:lstStyle/>
-          <a:p>
-            <a:pPr>
-              <a:spcAft>
-                <a:spcPts val="100"/>
-              </a:spcAft>
-            </a:pPr>
-            <a:r>
-              <a:rPr sz="1500" b="1">
-                <a:solidFill>
-                  <a:srgbClr val="1F1F1F"/>
-                </a:solidFill>
-              </a:rPr>
-              <a:t>HTT</a:t>
-            </a:r>
-          </a:p>
-          <a:p>
-            <a:pPr>
-              <a:spcAft>
-                <a:spcPts val="100"/>
-              </a:spcAft>
-            </a:pPr>
-            <a:r>
-              <a:rPr sz="1000" b="0">
-                <a:solidFill>
-                  <a:srgbClr val="6B6B6B"/>
-                </a:solidFill>
-              </a:rPr>
-              <a:t>first-pass yield 77.1% · 265 units</a:t>
-            </a:r>
-          </a:p>
-        </p:txBody>
-      </p:sp>
-      <p:sp>
-        <p:nvSpPr>
-          <p:cNvPr id="12" name="TextBox 11"/>
-          <p:cNvSpPr txBox="1"/>
-          <p:nvPr/>
-        </p:nvSpPr>
-        <p:spPr>
-          <a:xfrm>
-            <a:off x="8275320" y="2542032"/>
-            <a:ext cx="3566160" cy="868680"/>
-          </a:xfrm>
-          <a:prstGeom prst="rect">
-            <a:avLst/>
-          </a:prstGeom>
-          <a:noFill/>
-        </p:spPr>
-        <p:txBody>
-          <a:bodyPr wrap="square">
-            <a:spAutoFit/>
-          </a:bodyPr>
-          <a:lstStyle/>
-          <a:p>
-            <a:pPr>
-              <a:spcAft>
-                <a:spcPts val="200"/>
-              </a:spcAft>
-            </a:pPr>
-            <a:r>
-              <a:rPr sz="4000" b="1">
-                <a:solidFill>
-                  <a:srgbClr val="C0392B"/>
-                </a:solidFill>
-              </a:rPr>
-              <a:t>0.0%</a:t>
-            </a:r>
-          </a:p>
-          <a:p>
-            <a:pPr>
-              <a:spcAft>
-                <a:spcPts val="200"/>
-              </a:spcAft>
-            </a:pPr>
-            <a:r>
-              <a:rPr sz="1100" b="0">
-                <a:solidFill>
-                  <a:srgbClr val="6B6B6B"/>
-                </a:solidFill>
-              </a:rPr>
-              <a:t>0 of 68 first-pass failures came back</a:t>
-            </a:r>
-          </a:p>
-        </p:txBody>
-      </p:sp>
-      <p:sp>
-        <p:nvSpPr>
-          <p:cNvPr id="13" name="TextBox 12"/>
-          <p:cNvSpPr txBox="1"/>
-          <p:nvPr/>
-        </p:nvSpPr>
-        <p:spPr>
-          <a:xfrm>
-            <a:off x="8275320" y="3584448"/>
-            <a:ext cx="3566160" cy="1737360"/>
-          </a:xfrm>
-          <a:prstGeom prst="rect">
-            <a:avLst/>
-          </a:prstGeom>
-          <a:noFill/>
-        </p:spPr>
-        <p:txBody>
-          <a:bodyPr wrap="square">
-            <a:spAutoFit/>
-          </a:bodyPr>
-          <a:lstStyle/>
-          <a:p>
-            <a:pPr>
-              <a:spcAft>
-                <a:spcPts val="500"/>
-              </a:spcAft>
-            </a:pPr>
-            <a:r>
-              <a:rPr sz="1050" b="1">
-                <a:solidFill>
-                  <a:srgbClr val="6B6B6B"/>
-                </a:solidFill>
-              </a:rPr>
-              <a:t>What brought them back</a:t>
-            </a:r>
-          </a:p>
-          <a:p>
-            <a:pPr>
-              <a:spcAft>
-                <a:spcPts val="500"/>
-              </a:spcAft>
-            </a:pPr>
-            <a:r>
               <a:rPr sz="1100" b="0">
                 <a:solidFill>
                   <a:srgbClr val="6B6B6B"/>
@@ -20428,7 +20223,7 @@
       </p:sp>
       <p:sp>
         <p:nvSpPr>
-          <p:cNvPr id="14" name="Rectangle 13"/>
+          <p:cNvPr id="11" name="Rectangle 10"/>
           <p:cNvSpPr/>
           <p:nvPr/>
         </p:nvSpPr>
@@ -20472,7 +20267,7 @@
       </p:sp>
       <p:sp>
         <p:nvSpPr>
-          <p:cNvPr id="15" name="TextBox 14"/>
+          <p:cNvPr id="12" name="TextBox 11"/>
           <p:cNvSpPr txBox="1"/>
           <p:nvPr/>
         </p:nvSpPr>
